--- a/material/Data Analysis/03_numpy(2).pptx
+++ b/material/Data Analysis/03_numpy(2).pptx
@@ -1,6 +1,6 @@
 
 <file path=ppt/presentation.xml><?xml version="1.0" encoding="utf-8"?>
-<p:presentation xmlns:a="http://schemas.openxmlformats.org/drawingml/2006/main" xmlns:r="http://schemas.openxmlformats.org/officeDocument/2006/relationships" xmlns:p="http://schemas.openxmlformats.org/presentationml/2006/main" saveSubsetFonts="1">
+<p:presentation xmlns:a="http://schemas.openxmlformats.org/drawingml/2006/main" xmlns:r="http://schemas.openxmlformats.org/officeDocument/2006/relationships" xmlns:p="http://schemas.openxmlformats.org/presentationml/2006/main" embedTrueTypeFonts="1" saveSubsetFonts="1">
   <p:sldMasterIdLst>
     <p:sldMasterId id="2147483660" r:id="rId1"/>
   </p:sldMasterIdLst>
@@ -61,6 +61,34 @@
   </p:sldIdLst>
   <p:sldSz cx="12192000" cy="6858000"/>
   <p:notesSz cx="6858000" cy="9144000"/>
+  <p:embeddedFontLst>
+    <p:embeddedFont>
+      <p:font typeface="G마켓 산스 TTF Bold" panose="02000000000000000000" pitchFamily="2" charset="-127"/>
+      <p:bold r:id="rId53"/>
+    </p:embeddedFont>
+    <p:embeddedFont>
+      <p:font typeface="Pretendard Black" panose="02000A03000000020004" pitchFamily="2" charset="-127"/>
+      <p:bold r:id="rId54"/>
+    </p:embeddedFont>
+    <p:embeddedFont>
+      <p:font typeface="Pretendard Light" panose="02000403000000020004" pitchFamily="2" charset="-127"/>
+      <p:regular r:id="rId55"/>
+    </p:embeddedFont>
+    <p:embeddedFont>
+      <p:font typeface="Pretendard Medium" panose="02000603000000020004" pitchFamily="2" charset="-127"/>
+      <p:regular r:id="rId56"/>
+    </p:embeddedFont>
+    <p:embeddedFont>
+      <p:font typeface="맑은 고딕" panose="020B0503020000020004" pitchFamily="50" charset="-127"/>
+      <p:regular r:id="rId57"/>
+      <p:bold r:id="rId58"/>
+    </p:embeddedFont>
+    <p:embeddedFont>
+      <p:font typeface="메이플스토리" panose="02000300000000000000" pitchFamily="2" charset="-127"/>
+      <p:regular r:id="rId59"/>
+      <p:bold r:id="rId60"/>
+    </p:embeddedFont>
+  </p:embeddedFontLst>
   <p:defaultTextStyle>
     <a:defPPr>
       <a:defRPr lang="ko-KR"/>
@@ -267,7 +295,7 @@
             <a:fld id="{A13A867C-D490-40C2-AB8D-A60FA70A9BF5}" type="datetimeFigureOut">
               <a:rPr lang="ko-KR" altLang="en-US" smtClean="0"/>
               <a:pPr/>
-              <a:t>2025-08-05</a:t>
+              <a:t>2025-08-21</a:t>
             </a:fld>
             <a:endParaRPr lang="ko-KR" altLang="en-US" dirty="0"/>
           </a:p>
@@ -5575,7 +5603,7 @@
           <a:p>
             <a:fld id="{442BEE3F-2E9A-4FD8-8B8A-8619F3E161C0}" type="datetime1">
               <a:rPr lang="ko-KR" altLang="en-US" smtClean="0"/>
-              <a:t>2025-08-05</a:t>
+              <a:t>2025-08-21</a:t>
             </a:fld>
             <a:endParaRPr lang="ko-KR" altLang="en-US"/>
           </a:p>
@@ -5862,7 +5890,7 @@
           <a:p>
             <a:fld id="{0F78D9C4-20C1-4B15-A116-16DC77AD9A1E}" type="datetime1">
               <a:rPr lang="ko-KR" altLang="en-US" smtClean="0"/>
-              <a:t>2025-08-05</a:t>
+              <a:t>2025-08-21</a:t>
             </a:fld>
             <a:endParaRPr lang="ko-KR" altLang="en-US"/>
           </a:p>
@@ -6037,7 +6065,7 @@
           <a:p>
             <a:fld id="{7F5E23C3-0E3D-4E4E-8486-D7FB4C073DC1}" type="datetime1">
               <a:rPr lang="ko-KR" altLang="en-US" smtClean="0"/>
-              <a:t>2025-08-05</a:t>
+              <a:t>2025-08-21</a:t>
             </a:fld>
             <a:endParaRPr lang="ko-KR" altLang="en-US"/>
           </a:p>
@@ -6366,7 +6394,7 @@
           <a:p>
             <a:fld id="{7F5E23C3-0E3D-4E4E-8486-D7FB4C073DC1}" type="datetime1">
               <a:rPr lang="ko-KR" altLang="en-US" smtClean="0"/>
-              <a:t>2025-08-05</a:t>
+              <a:t>2025-08-21</a:t>
             </a:fld>
             <a:endParaRPr lang="ko-KR" altLang="en-US"/>
           </a:p>
@@ -7215,7 +7243,7 @@
           <a:p>
             <a:fld id="{0F78D9C4-20C1-4B15-A116-16DC77AD9A1E}" type="datetime1">
               <a:rPr lang="ko-KR" altLang="en-US" smtClean="0"/>
-              <a:t>2025-08-05</a:t>
+              <a:t>2025-08-21</a:t>
             </a:fld>
             <a:endParaRPr lang="ko-KR" altLang="en-US" dirty="0"/>
           </a:p>
@@ -7701,7 +7729,7 @@
           <a:p>
             <a:fld id="{0F78D9C4-20C1-4B15-A116-16DC77AD9A1E}" type="datetime1">
               <a:rPr lang="ko-KR" altLang="en-US" smtClean="0"/>
-              <a:t>2025-08-05</a:t>
+              <a:t>2025-08-21</a:t>
             </a:fld>
             <a:endParaRPr lang="ko-KR" altLang="en-US" dirty="0"/>
           </a:p>
@@ -8481,7 +8509,7 @@
           <a:p>
             <a:fld id="{0F78D9C4-20C1-4B15-A116-16DC77AD9A1E}" type="datetime1">
               <a:rPr lang="ko-KR" altLang="en-US" smtClean="0"/>
-              <a:t>2025-08-05</a:t>
+              <a:t>2025-08-21</a:t>
             </a:fld>
             <a:endParaRPr lang="ko-KR" altLang="en-US" dirty="0"/>
           </a:p>
@@ -9359,7 +9387,7 @@
           <a:p>
             <a:fld id="{0F78D9C4-20C1-4B15-A116-16DC77AD9A1E}" type="datetime1">
               <a:rPr lang="ko-KR" altLang="en-US" smtClean="0"/>
-              <a:t>2025-08-05</a:t>
+              <a:t>2025-08-21</a:t>
             </a:fld>
             <a:endParaRPr lang="ko-KR" altLang="en-US"/>
           </a:p>
@@ -9680,7 +9708,7 @@
           <a:p>
             <a:fld id="{0F78D9C4-20C1-4B15-A116-16DC77AD9A1E}" type="datetime1">
               <a:rPr lang="ko-KR" altLang="en-US" smtClean="0"/>
-              <a:t>2025-08-05</a:t>
+              <a:t>2025-08-21</a:t>
             </a:fld>
             <a:endParaRPr lang="ko-KR" altLang="en-US"/>
           </a:p>
@@ -9957,7 +9985,7 @@
           <a:p>
             <a:fld id="{0F78D9C4-20C1-4B15-A116-16DC77AD9A1E}" type="datetime1">
               <a:rPr lang="ko-KR" altLang="en-US" smtClean="0"/>
-              <a:t>2025-08-05</a:t>
+              <a:t>2025-08-21</a:t>
             </a:fld>
             <a:endParaRPr lang="ko-KR" altLang="en-US"/>
           </a:p>
@@ -10135,7 +10163,7 @@
           <a:p>
             <a:fld id="{0F78D9C4-20C1-4B15-A116-16DC77AD9A1E}" type="datetime1">
               <a:rPr lang="ko-KR" altLang="en-US" smtClean="0"/>
-              <a:t>2025-08-05</a:t>
+              <a:t>2025-08-21</a:t>
             </a:fld>
             <a:endParaRPr lang="ko-KR" altLang="en-US" dirty="0"/>
           </a:p>
@@ -10890,7 +10918,7 @@
           <a:p>
             <a:fld id="{0F78D9C4-20C1-4B15-A116-16DC77AD9A1E}" type="datetime1">
               <a:rPr lang="ko-KR" altLang="en-US" smtClean="0"/>
-              <a:t>2025-08-05</a:t>
+              <a:t>2025-08-21</a:t>
             </a:fld>
             <a:endParaRPr lang="ko-KR" altLang="en-US" dirty="0"/>
           </a:p>
@@ -11540,7 +11568,7 @@
           <a:p>
             <a:fld id="{0F78D9C4-20C1-4B15-A116-16DC77AD9A1E}" type="datetime1">
               <a:rPr lang="ko-KR" altLang="en-US" smtClean="0"/>
-              <a:t>2025-08-05</a:t>
+              <a:t>2025-08-21</a:t>
             </a:fld>
             <a:endParaRPr lang="ko-KR" altLang="en-US" dirty="0"/>
           </a:p>
@@ -12319,7 +12347,7 @@
           <a:p>
             <a:fld id="{0F78D9C4-20C1-4B15-A116-16DC77AD9A1E}" type="datetime1">
               <a:rPr lang="ko-KR" altLang="en-US" smtClean="0"/>
-              <a:t>2025-08-05</a:t>
+              <a:t>2025-08-21</a:t>
             </a:fld>
             <a:endParaRPr lang="ko-KR" altLang="en-US" dirty="0"/>
           </a:p>
@@ -13145,7 +13173,7 @@
           <a:p>
             <a:fld id="{0F78D9C4-20C1-4B15-A116-16DC77AD9A1E}" type="datetime1">
               <a:rPr lang="ko-KR" altLang="en-US" smtClean="0"/>
-              <a:t>2025-08-05</a:t>
+              <a:t>2025-08-21</a:t>
             </a:fld>
             <a:endParaRPr lang="ko-KR" altLang="en-US"/>
           </a:p>
@@ -13486,7 +13514,7 @@
           <a:p>
             <a:fld id="{0F78D9C4-20C1-4B15-A116-16DC77AD9A1E}" type="datetime1">
               <a:rPr lang="ko-KR" altLang="en-US" smtClean="0"/>
-              <a:t>2025-08-05</a:t>
+              <a:t>2025-08-21</a:t>
             </a:fld>
             <a:endParaRPr lang="ko-KR" altLang="en-US"/>
           </a:p>
@@ -13664,7 +13692,7 @@
           <a:p>
             <a:fld id="{0F78D9C4-20C1-4B15-A116-16DC77AD9A1E}" type="datetime1">
               <a:rPr lang="ko-KR" altLang="en-US" smtClean="0"/>
-              <a:t>2025-08-05</a:t>
+              <a:t>2025-08-21</a:t>
             </a:fld>
             <a:endParaRPr lang="ko-KR" altLang="en-US" dirty="0"/>
           </a:p>
@@ -14070,7 +14098,7 @@
           <a:p>
             <a:fld id="{0F78D9C4-20C1-4B15-A116-16DC77AD9A1E}" type="datetime1">
               <a:rPr lang="ko-KR" altLang="en-US" smtClean="0"/>
-              <a:t>2025-08-05</a:t>
+              <a:t>2025-08-21</a:t>
             </a:fld>
             <a:endParaRPr lang="ko-KR" altLang="en-US" dirty="0"/>
           </a:p>
@@ -14447,7 +14475,7 @@
           <a:p>
             <a:fld id="{0F78D9C4-20C1-4B15-A116-16DC77AD9A1E}" type="datetime1">
               <a:rPr lang="ko-KR" altLang="en-US" smtClean="0"/>
-              <a:t>2025-08-05</a:t>
+              <a:t>2025-08-21</a:t>
             </a:fld>
             <a:endParaRPr lang="ko-KR" altLang="en-US" dirty="0"/>
           </a:p>
@@ -15170,7 +15198,7 @@
           <a:p>
             <a:fld id="{0F78D9C4-20C1-4B15-A116-16DC77AD9A1E}" type="datetime1">
               <a:rPr lang="ko-KR" altLang="en-US" smtClean="0"/>
-              <a:t>2025-08-05</a:t>
+              <a:t>2025-08-21</a:t>
             </a:fld>
             <a:endParaRPr lang="ko-KR" altLang="en-US" dirty="0"/>
           </a:p>
@@ -15832,7 +15860,7 @@
           <a:p>
             <a:fld id="{0F78D9C4-20C1-4B15-A116-16DC77AD9A1E}" type="datetime1">
               <a:rPr lang="ko-KR" altLang="en-US" smtClean="0"/>
-              <a:t>2025-08-05</a:t>
+              <a:t>2025-08-21</a:t>
             </a:fld>
             <a:endParaRPr lang="ko-KR" altLang="en-US" dirty="0"/>
           </a:p>
@@ -16447,7 +16475,7 @@
           <a:p>
             <a:fld id="{0F78D9C4-20C1-4B15-A116-16DC77AD9A1E}" type="datetime1">
               <a:rPr lang="ko-KR" altLang="en-US" smtClean="0"/>
-              <a:t>2025-08-05</a:t>
+              <a:t>2025-08-21</a:t>
             </a:fld>
             <a:endParaRPr lang="ko-KR" altLang="en-US" dirty="0"/>
           </a:p>
@@ -17995,7 +18023,7 @@
           <a:p>
             <a:fld id="{0F78D9C4-20C1-4B15-A116-16DC77AD9A1E}" type="datetime1">
               <a:rPr lang="ko-KR" altLang="en-US" smtClean="0"/>
-              <a:t>2025-08-05</a:t>
+              <a:t>2025-08-21</a:t>
             </a:fld>
             <a:endParaRPr lang="ko-KR" altLang="en-US" dirty="0"/>
           </a:p>
@@ -18368,7 +18396,7 @@
           <a:p>
             <a:fld id="{0F78D9C4-20C1-4B15-A116-16DC77AD9A1E}" type="datetime1">
               <a:rPr lang="ko-KR" altLang="en-US" smtClean="0"/>
-              <a:t>2025-08-05</a:t>
+              <a:t>2025-08-21</a:t>
             </a:fld>
             <a:endParaRPr lang="ko-KR" altLang="en-US" dirty="0"/>
           </a:p>
@@ -18741,7 +18769,7 @@
           <a:p>
             <a:fld id="{0F78D9C4-20C1-4B15-A116-16DC77AD9A1E}" type="datetime1">
               <a:rPr lang="ko-KR" altLang="en-US" smtClean="0"/>
-              <a:t>2025-08-05</a:t>
+              <a:t>2025-08-21</a:t>
             </a:fld>
             <a:endParaRPr lang="ko-KR" altLang="en-US" dirty="0"/>
           </a:p>
@@ -19114,7 +19142,7 @@
           <a:p>
             <a:fld id="{0F78D9C4-20C1-4B15-A116-16DC77AD9A1E}" type="datetime1">
               <a:rPr lang="ko-KR" altLang="en-US" smtClean="0"/>
-              <a:t>2025-08-05</a:t>
+              <a:t>2025-08-21</a:t>
             </a:fld>
             <a:endParaRPr lang="ko-KR" altLang="en-US" dirty="0"/>
           </a:p>
@@ -19498,7 +19526,7 @@
           <a:p>
             <a:fld id="{0F78D9C4-20C1-4B15-A116-16DC77AD9A1E}" type="datetime1">
               <a:rPr lang="ko-KR" altLang="en-US" smtClean="0"/>
-              <a:t>2025-08-05</a:t>
+              <a:t>2025-08-21</a:t>
             </a:fld>
             <a:endParaRPr lang="ko-KR" altLang="en-US" dirty="0"/>
           </a:p>
@@ -21030,7 +21058,7 @@
           <a:p>
             <a:fld id="{0F78D9C4-20C1-4B15-A116-16DC77AD9A1E}" type="datetime1">
               <a:rPr lang="ko-KR" altLang="en-US" smtClean="0"/>
-              <a:t>2025-08-05</a:t>
+              <a:t>2025-08-21</a:t>
             </a:fld>
             <a:endParaRPr lang="ko-KR" altLang="en-US"/>
           </a:p>
@@ -21324,7 +21352,7 @@
           <a:p>
             <a:fld id="{0F78D9C4-20C1-4B15-A116-16DC77AD9A1E}" type="datetime1">
               <a:rPr lang="ko-KR" altLang="en-US" smtClean="0"/>
-              <a:t>2025-08-05</a:t>
+              <a:t>2025-08-21</a:t>
             </a:fld>
             <a:endParaRPr lang="ko-KR" altLang="en-US"/>
           </a:p>
@@ -21661,7 +21689,7 @@
           <a:p>
             <a:fld id="{0F78D9C4-20C1-4B15-A116-16DC77AD9A1E}" type="datetime1">
               <a:rPr lang="ko-KR" altLang="en-US" smtClean="0"/>
-              <a:t>2025-08-05</a:t>
+              <a:t>2025-08-21</a:t>
             </a:fld>
             <a:endParaRPr lang="ko-KR" altLang="en-US"/>
           </a:p>
@@ -21839,7 +21867,7 @@
           <a:p>
             <a:fld id="{0F78D9C4-20C1-4B15-A116-16DC77AD9A1E}" type="datetime1">
               <a:rPr lang="ko-KR" altLang="en-US" smtClean="0"/>
-              <a:t>2025-08-05</a:t>
+              <a:t>2025-08-21</a:t>
             </a:fld>
             <a:endParaRPr lang="ko-KR" altLang="en-US" dirty="0"/>
           </a:p>
@@ -22442,7 +22470,7 @@
           <a:p>
             <a:fld id="{0F78D9C4-20C1-4B15-A116-16DC77AD9A1E}" type="datetime1">
               <a:rPr lang="ko-KR" altLang="en-US" smtClean="0"/>
-              <a:t>2025-08-05</a:t>
+              <a:t>2025-08-21</a:t>
             </a:fld>
             <a:endParaRPr lang="ko-KR" altLang="en-US" dirty="0"/>
           </a:p>
@@ -22821,7 +22849,7 @@
           <a:p>
             <a:fld id="{0F78D9C4-20C1-4B15-A116-16DC77AD9A1E}" type="datetime1">
               <a:rPr lang="ko-KR" altLang="en-US" smtClean="0"/>
-              <a:t>2025-08-05</a:t>
+              <a:t>2025-08-21</a:t>
             </a:fld>
             <a:endParaRPr lang="ko-KR" altLang="en-US" dirty="0"/>
           </a:p>
@@ -23295,7 +23323,7 @@
           <a:p>
             <a:fld id="{0F78D9C4-20C1-4B15-A116-16DC77AD9A1E}" type="datetime1">
               <a:rPr lang="ko-KR" altLang="en-US" smtClean="0"/>
-              <a:t>2025-08-05</a:t>
+              <a:t>2025-08-21</a:t>
             </a:fld>
             <a:endParaRPr lang="ko-KR" altLang="en-US" dirty="0"/>
           </a:p>
@@ -23737,7 +23765,7 @@
           <a:p>
             <a:fld id="{0F78D9C4-20C1-4B15-A116-16DC77AD9A1E}" type="datetime1">
               <a:rPr lang="ko-KR" altLang="en-US" smtClean="0"/>
-              <a:t>2025-08-05</a:t>
+              <a:t>2025-08-21</a:t>
             </a:fld>
             <a:endParaRPr lang="ko-KR" altLang="en-US" dirty="0"/>
           </a:p>
@@ -24295,7 +24323,7 @@
           <a:p>
             <a:fld id="{0F78D9C4-20C1-4B15-A116-16DC77AD9A1E}" type="datetime1">
               <a:rPr lang="ko-KR" altLang="en-US" smtClean="0"/>
-              <a:t>2025-08-05</a:t>
+              <a:t>2025-08-21</a:t>
             </a:fld>
             <a:endParaRPr lang="ko-KR" altLang="en-US" dirty="0"/>
           </a:p>
@@ -24753,7 +24781,7 @@
           <a:p>
             <a:fld id="{0F78D9C4-20C1-4B15-A116-16DC77AD9A1E}" type="datetime1">
               <a:rPr lang="ko-KR" altLang="en-US" smtClean="0"/>
-              <a:t>2025-08-05</a:t>
+              <a:t>2025-08-21</a:t>
             </a:fld>
             <a:endParaRPr lang="ko-KR" altLang="en-US" dirty="0"/>
           </a:p>
@@ -25184,7 +25212,7 @@
           <a:p>
             <a:fld id="{0F78D9C4-20C1-4B15-A116-16DC77AD9A1E}" type="datetime1">
               <a:rPr lang="ko-KR" altLang="en-US" smtClean="0"/>
-              <a:t>2025-08-05</a:t>
+              <a:t>2025-08-21</a:t>
             </a:fld>
             <a:endParaRPr lang="ko-KR" altLang="en-US" dirty="0"/>
           </a:p>
@@ -25675,7 +25703,7 @@
           <a:p>
             <a:fld id="{0F78D9C4-20C1-4B15-A116-16DC77AD9A1E}" type="datetime1">
               <a:rPr lang="ko-KR" altLang="en-US" smtClean="0"/>
-              <a:t>2025-08-05</a:t>
+              <a:t>2025-08-21</a:t>
             </a:fld>
             <a:endParaRPr lang="ko-KR" altLang="en-US" dirty="0"/>
           </a:p>
@@ -26150,7 +26178,7 @@
           <a:p>
             <a:fld id="{0F78D9C4-20C1-4B15-A116-16DC77AD9A1E}" type="datetime1">
               <a:rPr lang="ko-KR" altLang="en-US" smtClean="0"/>
-              <a:t>2025-08-05</a:t>
+              <a:t>2025-08-21</a:t>
             </a:fld>
             <a:endParaRPr lang="ko-KR" altLang="en-US" dirty="0"/>
           </a:p>
@@ -26712,7 +26740,7 @@
           <a:p>
             <a:fld id="{0F78D9C4-20C1-4B15-A116-16DC77AD9A1E}" type="datetime1">
               <a:rPr lang="ko-KR" altLang="en-US" smtClean="0"/>
-              <a:t>2025-08-05</a:t>
+              <a:t>2025-08-21</a:t>
             </a:fld>
             <a:endParaRPr lang="ko-KR" altLang="en-US" dirty="0"/>
           </a:p>
@@ -27537,7 +27565,7 @@
           <a:p>
             <a:fld id="{0F78D9C4-20C1-4B15-A116-16DC77AD9A1E}" type="datetime1">
               <a:rPr lang="ko-KR" altLang="en-US" smtClean="0"/>
-              <a:t>2025-08-05</a:t>
+              <a:t>2025-08-21</a:t>
             </a:fld>
             <a:endParaRPr lang="ko-KR" altLang="en-US"/>
           </a:p>
@@ -27667,7 +27695,7 @@
           <a:p>
             <a:fld id="{0F78D9C4-20C1-4B15-A116-16DC77AD9A1E}" type="datetime1">
               <a:rPr lang="ko-KR" altLang="en-US" smtClean="0"/>
-              <a:t>2025-08-05</a:t>
+              <a:t>2025-08-21</a:t>
             </a:fld>
             <a:endParaRPr lang="ko-KR" altLang="en-US" dirty="0"/>
           </a:p>
@@ -28385,7 +28413,7 @@
           <a:p>
             <a:fld id="{0F78D9C4-20C1-4B15-A116-16DC77AD9A1E}" type="datetime1">
               <a:rPr lang="ko-KR" altLang="en-US" smtClean="0"/>
-              <a:t>2025-08-05</a:t>
+              <a:t>2025-08-21</a:t>
             </a:fld>
             <a:endParaRPr lang="ko-KR" altLang="en-US" dirty="0"/>
           </a:p>
@@ -29023,7 +29051,7 @@
           <a:p>
             <a:fld id="{0F78D9C4-20C1-4B15-A116-16DC77AD9A1E}" type="datetime1">
               <a:rPr lang="ko-KR" altLang="en-US" smtClean="0"/>
-              <a:t>2025-08-05</a:t>
+              <a:t>2025-08-21</a:t>
             </a:fld>
             <a:endParaRPr lang="ko-KR" altLang="en-US" dirty="0"/>
           </a:p>
@@ -29555,7 +29583,7 @@
           <a:p>
             <a:fld id="{0F78D9C4-20C1-4B15-A116-16DC77AD9A1E}" type="datetime1">
               <a:rPr lang="ko-KR" altLang="en-US" smtClean="0"/>
-              <a:t>2025-08-05</a:t>
+              <a:t>2025-08-21</a:t>
             </a:fld>
             <a:endParaRPr lang="ko-KR" altLang="en-US" dirty="0"/>
           </a:p>
@@ -30097,7 +30125,7 @@
           <a:p>
             <a:fld id="{0F78D9C4-20C1-4B15-A116-16DC77AD9A1E}" type="datetime1">
               <a:rPr lang="ko-KR" altLang="en-US" smtClean="0"/>
-              <a:t>2025-08-05</a:t>
+              <a:t>2025-08-21</a:t>
             </a:fld>
             <a:endParaRPr lang="ko-KR" altLang="en-US" dirty="0"/>
           </a:p>
